--- a/madd-decks/dagger-alif/07-sad-dad.pptx
+++ b/madd-decks/dagger-alif/07-sad-dad.pptx
@@ -4,6 +4,9 @@
   <p:sldMasterIdLst>
     <p:sldMasterId id="2147483648" r:id="rId1"/>
   </p:sldMasterIdLst>
+  <p:notesMasterIdLst>
+    <p:notesMasterId r:id="rId26"/>
+  </p:notesMasterIdLst>
   <p:sldIdLst>
     <p:sldId id="256" r:id="rId2"/>
     <p:sldId id="257" r:id="rId3"/>
@@ -30,9 +33,6 @@
     <p:sldId id="278" r:id="rId24"/>
     <p:sldId id="279" r:id="rId25"/>
   </p:sldIdLst>
-  <p:notesMasterIdLst>
-    <p:notesMasterId r:id="rId26"/>
-  </p:notesMasterIdLst>
   <p:sldSz cx="9144000" cy="5143500"/>
   <p:notesSz cx="5143500" cy="9144000"/>
   <p:defaultTextStyle>
@@ -4755,9 +4755,6 @@
               </a:rPr>
               <a:t>ضَ</a:t>
             </a:r>
-            <a:pPr algn="ctr" indent="0" marL="0">
-              <a:buNone/>
-            </a:pPr>
             <a:r>
               <a:rPr lang="ar-SA" altLang="en-US" sz="5850" dirty="0">
                 <a:solidFill>
@@ -4769,9 +4766,6 @@
               </a:rPr>
               <a:t>ا</a:t>
             </a:r>
-            <a:pPr algn="ctr" indent="0" marL="0">
-              <a:buNone/>
-            </a:pPr>
             <a:r>
               <a:rPr lang="ar-SA" altLang="en-US" sz="9000" dirty="0">
                 <a:solidFill>
@@ -6194,9 +6188,6 @@
               </a:rPr>
               <a:t>ضَ</a:t>
             </a:r>
-            <a:pPr algn="ctr" indent="0" marL="0">
-              <a:buNone/>
-            </a:pPr>
             <a:r>
               <a:rPr lang="ar-SA" altLang="en-US" sz="5850" dirty="0">
                 <a:solidFill>
@@ -6208,9 +6199,6 @@
               </a:rPr>
               <a:t>ا</a:t>
             </a:r>
-            <a:pPr algn="ctr" indent="0" marL="0">
-              <a:buNone/>
-            </a:pPr>
             <a:r>
               <a:rPr lang="ar-SA" altLang="en-US" sz="9000" dirty="0">
                 <a:solidFill>
@@ -7633,9 +7621,6 @@
               </a:rPr>
               <a:t>ضَ</a:t>
             </a:r>
-            <a:pPr algn="ctr" indent="0" marL="0">
-              <a:buNone/>
-            </a:pPr>
             <a:r>
               <a:rPr lang="ar-SA" altLang="en-US" sz="5850" dirty="0">
                 <a:solidFill>
@@ -7647,9 +7632,6 @@
               </a:rPr>
               <a:t>ا</a:t>
             </a:r>
-            <a:pPr algn="ctr" indent="0" marL="0">
-              <a:buNone/>
-            </a:pPr>
             <a:r>
               <a:rPr lang="ar-SA" altLang="en-US" sz="9000" dirty="0">
                 <a:solidFill>
@@ -9200,9 +9182,6 @@
               </a:rPr>
               <a:t>رَقَصَ</a:t>
             </a:r>
-            <a:pPr algn="ctr" indent="0" marL="0">
-              <a:buNone/>
-            </a:pPr>
             <a:r>
               <a:rPr lang="ar-SA" altLang="en-US" sz="4290" dirty="0">
                 <a:solidFill>
@@ -10915,9 +10894,6 @@
               </a:rPr>
               <a:t>نَقَصَ</a:t>
             </a:r>
-            <a:pPr algn="ctr" indent="0" marL="0">
-              <a:buNone/>
-            </a:pPr>
             <a:r>
               <a:rPr lang="ar-SA" altLang="en-US" sz="4290" dirty="0">
                 <a:solidFill>
@@ -12630,9 +12606,6 @@
               </a:rPr>
               <a:t>فَحَصَ</a:t>
             </a:r>
-            <a:pPr algn="ctr" indent="0" marL="0">
-              <a:buNone/>
-            </a:pPr>
             <a:r>
               <a:rPr lang="ar-SA" altLang="en-US" sz="4290" dirty="0">
                 <a:solidFill>
@@ -14345,9 +14318,6 @@
               </a:rPr>
               <a:t>صَ</a:t>
             </a:r>
-            <a:pPr algn="ctr" indent="0" marL="0">
-              <a:buNone/>
-            </a:pPr>
             <a:r>
               <a:rPr lang="ar-SA" altLang="en-US" sz="4290" dirty="0">
                 <a:solidFill>
@@ -14359,9 +14329,6 @@
               </a:rPr>
               <a:t>ا</a:t>
             </a:r>
-            <a:pPr algn="ctr" indent="0" marL="0">
-              <a:buNone/>
-            </a:pPr>
             <a:r>
               <a:rPr lang="ar-SA" altLang="en-US" sz="6600" dirty="0">
                 <a:solidFill>
@@ -16074,9 +16041,6 @@
               </a:rPr>
               <a:t>صَ</a:t>
             </a:r>
-            <a:pPr algn="ctr" indent="0" marL="0">
-              <a:buNone/>
-            </a:pPr>
             <a:r>
               <a:rPr lang="ar-SA" altLang="en-US" sz="4290" dirty="0">
                 <a:solidFill>
@@ -16088,9 +16052,6 @@
               </a:rPr>
               <a:t>ا</a:t>
             </a:r>
-            <a:pPr algn="ctr" indent="0" marL="0">
-              <a:buNone/>
-            </a:pPr>
             <a:r>
               <a:rPr lang="ar-SA" altLang="en-US" sz="6600" dirty="0">
                 <a:solidFill>
@@ -17803,9 +17764,6 @@
               </a:rPr>
               <a:t>صَ</a:t>
             </a:r>
-            <a:pPr algn="ctr" indent="0" marL="0">
-              <a:buNone/>
-            </a:pPr>
             <a:r>
               <a:rPr lang="ar-SA" altLang="en-US" sz="4290" dirty="0">
                 <a:solidFill>
@@ -17817,9 +17775,6 @@
               </a:rPr>
               <a:t>ا</a:t>
             </a:r>
-            <a:pPr algn="ctr" indent="0" marL="0">
-              <a:buNone/>
-            </a:pPr>
             <a:r>
               <a:rPr lang="ar-SA" altLang="en-US" sz="6600" dirty="0">
                 <a:solidFill>
@@ -19532,9 +19487,6 @@
               </a:rPr>
               <a:t>نَهَضَ</a:t>
             </a:r>
-            <a:pPr algn="ctr" indent="0" marL="0">
-              <a:buNone/>
-            </a:pPr>
             <a:r>
               <a:rPr lang="ar-SA" altLang="en-US" sz="4290" dirty="0">
                 <a:solidFill>
@@ -21119,9 +21071,6 @@
               </a:rPr>
               <a:t>عَصَ</a:t>
             </a:r>
-            <a:pPr algn="ctr" indent="0" marL="0">
-              <a:buNone/>
-            </a:pPr>
             <a:r>
               <a:rPr lang="ar-SA" altLang="en-US" sz="5850" dirty="0">
                 <a:solidFill>
@@ -22672,9 +22621,6 @@
               </a:rPr>
               <a:t>قَبَضَ</a:t>
             </a:r>
-            <a:pPr algn="ctr" indent="0" marL="0">
-              <a:buNone/>
-            </a:pPr>
             <a:r>
               <a:rPr lang="ar-SA" altLang="en-US" sz="4290" dirty="0">
                 <a:solidFill>
@@ -24387,9 +24333,6 @@
               </a:rPr>
               <a:t>فَرَضَ</a:t>
             </a:r>
-            <a:pPr algn="ctr" indent="0" marL="0">
-              <a:buNone/>
-            </a:pPr>
             <a:r>
               <a:rPr lang="ar-SA" altLang="en-US" sz="4290" dirty="0">
                 <a:solidFill>
@@ -26102,9 +26045,6 @@
               </a:rPr>
               <a:t>ضَ</a:t>
             </a:r>
-            <a:pPr algn="ctr" indent="0" marL="0">
-              <a:buNone/>
-            </a:pPr>
             <a:r>
               <a:rPr lang="ar-SA" altLang="en-US" sz="4290" dirty="0">
                 <a:solidFill>
@@ -26116,9 +26056,6 @@
               </a:rPr>
               <a:t>ا</a:t>
             </a:r>
-            <a:pPr algn="ctr" indent="0" marL="0">
-              <a:buNone/>
-            </a:pPr>
             <a:r>
               <a:rPr lang="ar-SA" altLang="en-US" sz="6600" dirty="0">
                 <a:solidFill>
@@ -27831,9 +27768,6 @@
               </a:rPr>
               <a:t>ضَ</a:t>
             </a:r>
-            <a:pPr algn="ctr" indent="0" marL="0">
-              <a:buNone/>
-            </a:pPr>
             <a:r>
               <a:rPr lang="ar-SA" altLang="en-US" sz="4290" dirty="0">
                 <a:solidFill>
@@ -27845,9 +27779,6 @@
               </a:rPr>
               <a:t>ا</a:t>
             </a:r>
-            <a:pPr algn="ctr" indent="0" marL="0">
-              <a:buNone/>
-            </a:pPr>
             <a:r>
               <a:rPr lang="ar-SA" altLang="en-US" sz="6600" dirty="0">
                 <a:solidFill>
@@ -29560,9 +29491,6 @@
               </a:rPr>
               <a:t>ضَ</a:t>
             </a:r>
-            <a:pPr algn="ctr" indent="0" marL="0">
-              <a:buNone/>
-            </a:pPr>
             <a:r>
               <a:rPr lang="ar-SA" altLang="en-US" sz="4290" dirty="0">
                 <a:solidFill>
@@ -29574,9 +29502,6 @@
               </a:rPr>
               <a:t>ا</a:t>
             </a:r>
-            <a:pPr algn="ctr" indent="0" marL="0">
-              <a:buNone/>
-            </a:pPr>
             <a:r>
               <a:rPr lang="ar-SA" altLang="en-US" sz="6600" dirty="0">
                 <a:solidFill>
@@ -31161,9 +31086,6 @@
               </a:rPr>
               <a:t>صَ</a:t>
             </a:r>
-            <a:pPr algn="ctr" indent="0" marL="0">
-              <a:buNone/>
-            </a:pPr>
             <a:r>
               <a:rPr lang="ar-SA" altLang="en-US" sz="5850" dirty="0">
                 <a:solidFill>
@@ -31175,9 +31097,6 @@
               </a:rPr>
               <a:t>ا</a:t>
             </a:r>
-            <a:pPr algn="ctr" indent="0" marL="0">
-              <a:buNone/>
-            </a:pPr>
             <a:r>
               <a:rPr lang="ar-SA" altLang="en-US" sz="9000" dirty="0">
                 <a:solidFill>
@@ -32600,9 +32519,6 @@
               </a:rPr>
               <a:t>صَ</a:t>
             </a:r>
-            <a:pPr algn="ctr" indent="0" marL="0">
-              <a:buNone/>
-            </a:pPr>
             <a:r>
               <a:rPr lang="ar-SA" altLang="en-US" sz="5850" dirty="0">
                 <a:solidFill>
@@ -32614,9 +32530,6 @@
               </a:rPr>
               <a:t>ا</a:t>
             </a:r>
-            <a:pPr algn="ctr" indent="0" marL="0">
-              <a:buNone/>
-            </a:pPr>
             <a:r>
               <a:rPr lang="ar-SA" altLang="en-US" sz="9000" dirty="0">
                 <a:solidFill>
@@ -34039,9 +33952,6 @@
               </a:rPr>
               <a:t>صَ</a:t>
             </a:r>
-            <a:pPr algn="ctr" indent="0" marL="0">
-              <a:buNone/>
-            </a:pPr>
             <a:r>
               <a:rPr lang="ar-SA" altLang="en-US" sz="5850" dirty="0">
                 <a:solidFill>
@@ -34053,9 +33963,6 @@
               </a:rPr>
               <a:t>ا</a:t>
             </a:r>
-            <a:pPr algn="ctr" indent="0" marL="0">
-              <a:buNone/>
-            </a:pPr>
             <a:r>
               <a:rPr lang="ar-SA" altLang="en-US" sz="9000" dirty="0">
                 <a:solidFill>
@@ -35478,9 +35385,6 @@
               </a:rPr>
               <a:t>صَ</a:t>
             </a:r>
-            <a:pPr algn="ctr" indent="0" marL="0">
-              <a:buNone/>
-            </a:pPr>
             <a:r>
               <a:rPr lang="ar-SA" altLang="en-US" sz="5850" dirty="0">
                 <a:solidFill>
@@ -35492,9 +35396,6 @@
               </a:rPr>
               <a:t>ا</a:t>
             </a:r>
-            <a:pPr algn="ctr" indent="0" marL="0">
-              <a:buNone/>
-            </a:pPr>
             <a:r>
               <a:rPr lang="ar-SA" altLang="en-US" sz="9000" dirty="0">
                 <a:solidFill>
@@ -36917,9 +36818,6 @@
               </a:rPr>
               <a:t>صَ</a:t>
             </a:r>
-            <a:pPr algn="ctr" indent="0" marL="0">
-              <a:buNone/>
-            </a:pPr>
             <a:r>
               <a:rPr lang="ar-SA" altLang="en-US" sz="5850" dirty="0">
                 <a:solidFill>
@@ -36931,9 +36829,6 @@
               </a:rPr>
               <a:t>ا</a:t>
             </a:r>
-            <a:pPr algn="ctr" indent="0" marL="0">
-              <a:buNone/>
-            </a:pPr>
             <a:r>
               <a:rPr lang="ar-SA" altLang="en-US" sz="9000" dirty="0">
                 <a:solidFill>
@@ -39278,9 +39173,6 @@
               </a:rPr>
               <a:t>نَضَ</a:t>
             </a:r>
-            <a:pPr algn="ctr" indent="0" marL="0">
-              <a:buNone/>
-            </a:pPr>
             <a:r>
               <a:rPr lang="ar-SA" altLang="en-US" sz="5850" dirty="0">
                 <a:solidFill>
